--- a/tests/golden/visual/composition/v5_process_narrative/deck.pptx
+++ b/tests/golden/visual/composition/v5_process_narrative/deck.pptx
@@ -910,7 +910,7 @@
         <p:spPr>
           <a:xfrm>
             <a:off x="640080" y="411480"/>
-            <a:ext cx="7863840" cy="411480"/>
+            <a:ext cx="7863840" cy="601218"/>
           </a:xfrm>
           <a:prstGeom prst="rect">
             <a:avLst/>
@@ -948,8 +948,8 @@
         </p:nvSpPr>
         <p:spPr>
           <a:xfrm>
-            <a:off x="640080" y="861060"/>
-            <a:ext cx="7863840" cy="292608"/>
+            <a:off x="640080" y="1050798"/>
+            <a:ext cx="7863840" cy="326898"/>
           </a:xfrm>
           <a:prstGeom prst="rect">
             <a:avLst/>
@@ -987,8 +987,8 @@
         </p:nvSpPr>
         <p:spPr>
           <a:xfrm>
-            <a:off x="640080" y="1229868"/>
-            <a:ext cx="1880235" cy="1386383"/>
+            <a:off x="640080" y="1453896"/>
+            <a:ext cx="1880235" cy="1263167"/>
           </a:xfrm>
           <a:prstGeom prst="rect">
             <a:avLst/>
@@ -996,11 +996,11 @@
           <a:solidFill>
             <a:srgbClr val="FFFFFF"/>
           </a:solidFill>
-          <a:ln w="12700">
+          <a:ln w="19050">
             <a:solidFill>
-              <a:srgbClr val="8B4513"/>
+              <a:srgbClr val="C47B2B"/>
             </a:solidFill>
-            <a:prstDash val="solid"/>
+            <a:prstDash val="dash"/>
           </a:ln>
         </p:spPr>
       </p:sp>
@@ -1012,7 +1012,7 @@
         </p:nvSpPr>
         <p:spPr>
           <a:xfrm>
-            <a:off x="777240" y="1740179"/>
+            <a:off x="777240" y="1902600"/>
             <a:ext cx="1605915" cy="365760"/>
           </a:xfrm>
           <a:prstGeom prst="rect">
@@ -1037,7 +1037,7 @@
                 <a:ea typeface="Microsoft YaHei" pitchFamily="34" charset="-122"/>
                 <a:cs typeface="Microsoft YaHei" pitchFamily="34" charset="-120"/>
               </a:rPr>
-              <a:t>图片占位</a:t>
+              <a:t>素材缺失/路径未解析</a:t>
             </a:r>
             <a:endParaRPr lang="en-US" sz="1200" dirty="0"/>
           </a:p>
@@ -1051,8 +1051,8 @@
         </p:nvSpPr>
         <p:spPr>
           <a:xfrm>
-            <a:off x="640080" y="2654351"/>
-            <a:ext cx="1880235" cy="1134313"/>
+            <a:off x="640080" y="2755163"/>
+            <a:ext cx="1880235" cy="1033501"/>
           </a:xfrm>
           <a:prstGeom prst="rect">
             <a:avLst/>
@@ -1090,7 +1090,7 @@
         </p:nvSpPr>
         <p:spPr>
           <a:xfrm>
-            <a:off x="2520315" y="2125447"/>
+            <a:off x="2520315" y="2271065"/>
             <a:ext cx="114300" cy="256032"/>
           </a:xfrm>
           <a:prstGeom prst="rect">
@@ -1115,8 +1115,8 @@
         </p:nvSpPr>
         <p:spPr>
           <a:xfrm>
-            <a:off x="2634615" y="1229868"/>
-            <a:ext cx="1880235" cy="1386383"/>
+            <a:off x="2634615" y="1453896"/>
+            <a:ext cx="1880235" cy="1263167"/>
           </a:xfrm>
           <a:prstGeom prst="rect">
             <a:avLst/>
@@ -1124,11 +1124,11 @@
           <a:solidFill>
             <a:srgbClr val="FFFFFF"/>
           </a:solidFill>
-          <a:ln w="12700">
+          <a:ln w="19050">
             <a:solidFill>
-              <a:srgbClr val="8B4513"/>
+              <a:srgbClr val="C47B2B"/>
             </a:solidFill>
-            <a:prstDash val="solid"/>
+            <a:prstDash val="dash"/>
           </a:ln>
         </p:spPr>
       </p:sp>
@@ -1140,7 +1140,7 @@
         </p:nvSpPr>
         <p:spPr>
           <a:xfrm>
-            <a:off x="2771775" y="1740179"/>
+            <a:off x="2771775" y="1902600"/>
             <a:ext cx="1605915" cy="365760"/>
           </a:xfrm>
           <a:prstGeom prst="rect">
@@ -1165,7 +1165,7 @@
                 <a:ea typeface="Microsoft YaHei" pitchFamily="34" charset="-122"/>
                 <a:cs typeface="Microsoft YaHei" pitchFamily="34" charset="-120"/>
               </a:rPr>
-              <a:t>图片占位</a:t>
+              <a:t>素材缺失/路径未解析</a:t>
             </a:r>
             <a:endParaRPr lang="en-US" sz="1200" dirty="0"/>
           </a:p>
@@ -1179,8 +1179,8 @@
         </p:nvSpPr>
         <p:spPr>
           <a:xfrm>
-            <a:off x="2634615" y="2654351"/>
-            <a:ext cx="1880235" cy="1134313"/>
+            <a:off x="2634615" y="2755163"/>
+            <a:ext cx="1880235" cy="1033501"/>
           </a:xfrm>
           <a:prstGeom prst="rect">
             <a:avLst/>
@@ -1218,7 +1218,7 @@
         </p:nvSpPr>
         <p:spPr>
           <a:xfrm>
-            <a:off x="4514850" y="2125447"/>
+            <a:off x="4514850" y="2271065"/>
             <a:ext cx="114300" cy="256032"/>
           </a:xfrm>
           <a:prstGeom prst="rect">
@@ -1243,8 +1243,8 @@
         </p:nvSpPr>
         <p:spPr>
           <a:xfrm>
-            <a:off x="4629150" y="1229868"/>
-            <a:ext cx="1880235" cy="1386383"/>
+            <a:off x="4629150" y="1453896"/>
+            <a:ext cx="1880235" cy="1263167"/>
           </a:xfrm>
           <a:prstGeom prst="rect">
             <a:avLst/>
@@ -1252,11 +1252,11 @@
           <a:solidFill>
             <a:srgbClr val="FFFFFF"/>
           </a:solidFill>
-          <a:ln w="12700">
+          <a:ln w="19050">
             <a:solidFill>
-              <a:srgbClr val="8B4513"/>
+              <a:srgbClr val="C47B2B"/>
             </a:solidFill>
-            <a:prstDash val="solid"/>
+            <a:prstDash val="dash"/>
           </a:ln>
         </p:spPr>
       </p:sp>
@@ -1268,7 +1268,7 @@
         </p:nvSpPr>
         <p:spPr>
           <a:xfrm>
-            <a:off x="4766310" y="1740179"/>
+            <a:off x="4766310" y="1902600"/>
             <a:ext cx="1605915" cy="365760"/>
           </a:xfrm>
           <a:prstGeom prst="rect">
@@ -1293,7 +1293,7 @@
                 <a:ea typeface="Microsoft YaHei" pitchFamily="34" charset="-122"/>
                 <a:cs typeface="Microsoft YaHei" pitchFamily="34" charset="-120"/>
               </a:rPr>
-              <a:t>图片占位</a:t>
+              <a:t>素材缺失/路径未解析</a:t>
             </a:r>
             <a:endParaRPr lang="en-US" sz="1200" dirty="0"/>
           </a:p>
@@ -1307,8 +1307,8 @@
         </p:nvSpPr>
         <p:spPr>
           <a:xfrm>
-            <a:off x="4629150" y="2654351"/>
-            <a:ext cx="1880235" cy="1134313"/>
+            <a:off x="4629150" y="2755163"/>
+            <a:ext cx="1880235" cy="1033501"/>
           </a:xfrm>
           <a:prstGeom prst="rect">
             <a:avLst/>
@@ -1346,7 +1346,7 @@
         </p:nvSpPr>
         <p:spPr>
           <a:xfrm>
-            <a:off x="6509385" y="2125447"/>
+            <a:off x="6509385" y="2271065"/>
             <a:ext cx="114300" cy="256032"/>
           </a:xfrm>
           <a:prstGeom prst="rect">
@@ -1371,8 +1371,8 @@
         </p:nvSpPr>
         <p:spPr>
           <a:xfrm>
-            <a:off x="6623685" y="1229868"/>
-            <a:ext cx="1880235" cy="1386383"/>
+            <a:off x="6623685" y="1453896"/>
+            <a:ext cx="1880235" cy="1263167"/>
           </a:xfrm>
           <a:prstGeom prst="rect">
             <a:avLst/>
@@ -1380,11 +1380,11 @@
           <a:solidFill>
             <a:srgbClr val="FFFFFF"/>
           </a:solidFill>
-          <a:ln w="12700">
+          <a:ln w="19050">
             <a:solidFill>
-              <a:srgbClr val="8B4513"/>
+              <a:srgbClr val="C47B2B"/>
             </a:solidFill>
-            <a:prstDash val="solid"/>
+            <a:prstDash val="dash"/>
           </a:ln>
         </p:spPr>
       </p:sp>
@@ -1396,7 +1396,7 @@
         </p:nvSpPr>
         <p:spPr>
           <a:xfrm>
-            <a:off x="6760845" y="1740179"/>
+            <a:off x="6760845" y="1902600"/>
             <a:ext cx="1605915" cy="365760"/>
           </a:xfrm>
           <a:prstGeom prst="rect">
@@ -1421,7 +1421,7 @@
                 <a:ea typeface="Microsoft YaHei" pitchFamily="34" charset="-122"/>
                 <a:cs typeface="Microsoft YaHei" pitchFamily="34" charset="-120"/>
               </a:rPr>
-              <a:t>图片占位</a:t>
+              <a:t>素材缺失/路径未解析</a:t>
             </a:r>
             <a:endParaRPr lang="en-US" sz="1200" dirty="0"/>
           </a:p>
@@ -1435,8 +1435,8 @@
         </p:nvSpPr>
         <p:spPr>
           <a:xfrm>
-            <a:off x="6623685" y="2654351"/>
-            <a:ext cx="1880235" cy="1134313"/>
+            <a:off x="6623685" y="2755163"/>
+            <a:ext cx="1880235" cy="1033501"/>
           </a:xfrm>
           <a:prstGeom prst="rect">
             <a:avLst/>

--- a/tests/golden/visual/composition/v5_process_narrative/deck.pptx
+++ b/tests/golden/visual/composition/v5_process_narrative/deck.pptx
@@ -910,7 +910,7 @@
         <p:spPr>
           <a:xfrm>
             <a:off x="640080" y="411480"/>
-            <a:ext cx="7863840" cy="601218"/>
+            <a:ext cx="7863840" cy="621792"/>
           </a:xfrm>
           <a:prstGeom prst="rect">
             <a:avLst/>
@@ -948,7 +948,7 @@
         </p:nvSpPr>
         <p:spPr>
           <a:xfrm>
-            <a:off x="640080" y="1050798"/>
+            <a:off x="640080" y="1071372"/>
             <a:ext cx="7863840" cy="326898"/>
           </a:xfrm>
           <a:prstGeom prst="rect">
@@ -987,8 +987,33 @@
         </p:nvSpPr>
         <p:spPr>
           <a:xfrm>
-            <a:off x="640080" y="1453896"/>
-            <a:ext cx="1880235" cy="1263167"/>
+            <a:off x="1580198" y="1752173"/>
+            <a:ext cx="5983605" cy="32004"/>
+          </a:xfrm>
+          <a:prstGeom prst="rect">
+            <a:avLst/>
+          </a:prstGeom>
+          <a:solidFill>
+            <a:srgbClr val="D9D5CF"/>
+          </a:solidFill>
+          <a:ln w="12700">
+            <a:solidFill>
+              <a:srgbClr val="D9D5CF"/>
+            </a:solidFill>
+            <a:prstDash val="solid"/>
+          </a:ln>
+        </p:spPr>
+      </p:sp>
+      <p:sp>
+        <p:nvSpPr>
+          <p:cNvPr id="5" name="Shape 3"/>
+          <p:cNvSpPr/>
+          <p:nvPr/>
+        </p:nvSpPr>
+        <p:spPr>
+          <a:xfrm>
+            <a:off x="640080" y="1474470"/>
+            <a:ext cx="1880235" cy="1251852"/>
           </a:xfrm>
           <a:prstGeom prst="rect">
             <a:avLst/>
@@ -1006,13 +1031,13 @@
       </p:sp>
       <p:sp>
         <p:nvSpPr>
-          <p:cNvPr id="5" name="Text 3"/>
-          <p:cNvSpPr/>
-          <p:nvPr/>
-        </p:nvSpPr>
-        <p:spPr>
-          <a:xfrm>
-            <a:off x="777240" y="1902600"/>
+          <p:cNvPr id="6" name="Text 4"/>
+          <p:cNvSpPr/>
+          <p:nvPr/>
+        </p:nvSpPr>
+        <p:spPr>
+          <a:xfrm>
+            <a:off x="777240" y="1917516"/>
             <a:ext cx="1605915" cy="365760"/>
           </a:xfrm>
           <a:prstGeom prst="rect">
@@ -1045,14 +1070,359 @@
       </p:sp>
       <p:sp>
         <p:nvSpPr>
-          <p:cNvPr id="6" name="Text 4"/>
-          <p:cNvSpPr/>
-          <p:nvPr/>
-        </p:nvSpPr>
-        <p:spPr>
-          <a:xfrm>
-            <a:off x="640080" y="2755163"/>
-            <a:ext cx="1880235" cy="1033501"/>
+          <p:cNvPr id="7" name="Shape 5"/>
+          <p:cNvSpPr/>
+          <p:nvPr/>
+        </p:nvSpPr>
+        <p:spPr>
+          <a:xfrm>
+            <a:off x="2520315" y="2284438"/>
+            <a:ext cx="114300" cy="256032"/>
+          </a:xfrm>
+          <a:prstGeom prst="rect">
+            <a:avLst/>
+          </a:prstGeom>
+          <a:solidFill>
+            <a:srgbClr val="FFFFFF"/>
+          </a:solidFill>
+          <a:ln w="12700">
+            <a:solidFill>
+              <a:srgbClr val="D9D5CF"/>
+            </a:solidFill>
+            <a:prstDash val="solid"/>
+          </a:ln>
+        </p:spPr>
+      </p:sp>
+      <p:sp>
+        <p:nvSpPr>
+          <p:cNvPr id="8" name="Shape 6"/>
+          <p:cNvSpPr/>
+          <p:nvPr/>
+        </p:nvSpPr>
+        <p:spPr>
+          <a:xfrm>
+            <a:off x="2634615" y="1474470"/>
+            <a:ext cx="1880235" cy="1251852"/>
+          </a:xfrm>
+          <a:prstGeom prst="rect">
+            <a:avLst/>
+          </a:prstGeom>
+          <a:solidFill>
+            <a:srgbClr val="FFFFFF"/>
+          </a:solidFill>
+          <a:ln w="19050">
+            <a:solidFill>
+              <a:srgbClr val="C47B2B"/>
+            </a:solidFill>
+            <a:prstDash val="dash"/>
+          </a:ln>
+        </p:spPr>
+      </p:sp>
+      <p:sp>
+        <p:nvSpPr>
+          <p:cNvPr id="9" name="Text 7"/>
+          <p:cNvSpPr/>
+          <p:nvPr/>
+        </p:nvSpPr>
+        <p:spPr>
+          <a:xfrm>
+            <a:off x="2771775" y="1917516"/>
+            <a:ext cx="1605915" cy="365760"/>
+          </a:xfrm>
+          <a:prstGeom prst="rect">
+            <a:avLst/>
+          </a:prstGeom>
+          <a:noFill/>
+          <a:ln/>
+        </p:spPr>
+        <p:txBody>
+          <a:bodyPr wrap="square" rtlCol="0" anchor="ctr"/>
+          <a:lstStyle/>
+          <a:p>
+            <a:pPr algn="ctr" indent="0" marL="0">
+              <a:buNone/>
+            </a:pPr>
+            <a:r>
+              <a:rPr lang="en-US" sz="1200" dirty="0">
+                <a:solidFill>
+                  <a:srgbClr val="777777"/>
+                </a:solidFill>
+                <a:latin typeface="Microsoft YaHei" pitchFamily="34" charset="0"/>
+                <a:ea typeface="Microsoft YaHei" pitchFamily="34" charset="-122"/>
+                <a:cs typeface="Microsoft YaHei" pitchFamily="34" charset="-120"/>
+              </a:rPr>
+              <a:t>素材缺失/路径未解析</a:t>
+            </a:r>
+            <a:endParaRPr lang="en-US" sz="1200" dirty="0"/>
+          </a:p>
+        </p:txBody>
+      </p:sp>
+      <p:sp>
+        <p:nvSpPr>
+          <p:cNvPr id="10" name="Shape 8"/>
+          <p:cNvSpPr/>
+          <p:nvPr/>
+        </p:nvSpPr>
+        <p:spPr>
+          <a:xfrm>
+            <a:off x="4514850" y="2284438"/>
+            <a:ext cx="114300" cy="256032"/>
+          </a:xfrm>
+          <a:prstGeom prst="rect">
+            <a:avLst/>
+          </a:prstGeom>
+          <a:solidFill>
+            <a:srgbClr val="FFFFFF"/>
+          </a:solidFill>
+          <a:ln w="12700">
+            <a:solidFill>
+              <a:srgbClr val="D9D5CF"/>
+            </a:solidFill>
+            <a:prstDash val="solid"/>
+          </a:ln>
+        </p:spPr>
+      </p:sp>
+      <p:sp>
+        <p:nvSpPr>
+          <p:cNvPr id="11" name="Shape 9"/>
+          <p:cNvSpPr/>
+          <p:nvPr/>
+        </p:nvSpPr>
+        <p:spPr>
+          <a:xfrm>
+            <a:off x="4629150" y="1474470"/>
+            <a:ext cx="1880235" cy="1251852"/>
+          </a:xfrm>
+          <a:prstGeom prst="rect">
+            <a:avLst/>
+          </a:prstGeom>
+          <a:solidFill>
+            <a:srgbClr val="FFFFFF"/>
+          </a:solidFill>
+          <a:ln w="19050">
+            <a:solidFill>
+              <a:srgbClr val="C47B2B"/>
+            </a:solidFill>
+            <a:prstDash val="dash"/>
+          </a:ln>
+        </p:spPr>
+      </p:sp>
+      <p:sp>
+        <p:nvSpPr>
+          <p:cNvPr id="12" name="Text 10"/>
+          <p:cNvSpPr/>
+          <p:nvPr/>
+        </p:nvSpPr>
+        <p:spPr>
+          <a:xfrm>
+            <a:off x="4766310" y="1917516"/>
+            <a:ext cx="1605915" cy="365760"/>
+          </a:xfrm>
+          <a:prstGeom prst="rect">
+            <a:avLst/>
+          </a:prstGeom>
+          <a:noFill/>
+          <a:ln/>
+        </p:spPr>
+        <p:txBody>
+          <a:bodyPr wrap="square" rtlCol="0" anchor="ctr"/>
+          <a:lstStyle/>
+          <a:p>
+            <a:pPr algn="ctr" indent="0" marL="0">
+              <a:buNone/>
+            </a:pPr>
+            <a:r>
+              <a:rPr lang="en-US" sz="1200" dirty="0">
+                <a:solidFill>
+                  <a:srgbClr val="777777"/>
+                </a:solidFill>
+                <a:latin typeface="Microsoft YaHei" pitchFamily="34" charset="0"/>
+                <a:ea typeface="Microsoft YaHei" pitchFamily="34" charset="-122"/>
+                <a:cs typeface="Microsoft YaHei" pitchFamily="34" charset="-120"/>
+              </a:rPr>
+              <a:t>素材缺失/路径未解析</a:t>
+            </a:r>
+            <a:endParaRPr lang="en-US" sz="1200" dirty="0"/>
+          </a:p>
+        </p:txBody>
+      </p:sp>
+      <p:sp>
+        <p:nvSpPr>
+          <p:cNvPr id="13" name="Shape 11"/>
+          <p:cNvSpPr/>
+          <p:nvPr/>
+        </p:nvSpPr>
+        <p:spPr>
+          <a:xfrm>
+            <a:off x="6509385" y="2284438"/>
+            <a:ext cx="114300" cy="256032"/>
+          </a:xfrm>
+          <a:prstGeom prst="rect">
+            <a:avLst/>
+          </a:prstGeom>
+          <a:solidFill>
+            <a:srgbClr val="FFFFFF"/>
+          </a:solidFill>
+          <a:ln w="12700">
+            <a:solidFill>
+              <a:srgbClr val="D9D5CF"/>
+            </a:solidFill>
+            <a:prstDash val="solid"/>
+          </a:ln>
+        </p:spPr>
+      </p:sp>
+      <p:sp>
+        <p:nvSpPr>
+          <p:cNvPr id="14" name="Shape 12"/>
+          <p:cNvSpPr/>
+          <p:nvPr/>
+        </p:nvSpPr>
+        <p:spPr>
+          <a:xfrm>
+            <a:off x="6623685" y="1474470"/>
+            <a:ext cx="1880235" cy="1251852"/>
+          </a:xfrm>
+          <a:prstGeom prst="rect">
+            <a:avLst/>
+          </a:prstGeom>
+          <a:solidFill>
+            <a:srgbClr val="FFFFFF"/>
+          </a:solidFill>
+          <a:ln w="19050">
+            <a:solidFill>
+              <a:srgbClr val="C47B2B"/>
+            </a:solidFill>
+            <a:prstDash val="dash"/>
+          </a:ln>
+        </p:spPr>
+      </p:sp>
+      <p:sp>
+        <p:nvSpPr>
+          <p:cNvPr id="15" name="Text 13"/>
+          <p:cNvSpPr/>
+          <p:nvPr/>
+        </p:nvSpPr>
+        <p:spPr>
+          <a:xfrm>
+            <a:off x="6760845" y="1917516"/>
+            <a:ext cx="1605915" cy="365760"/>
+          </a:xfrm>
+          <a:prstGeom prst="rect">
+            <a:avLst/>
+          </a:prstGeom>
+          <a:noFill/>
+          <a:ln/>
+        </p:spPr>
+        <p:txBody>
+          <a:bodyPr wrap="square" rtlCol="0" anchor="ctr"/>
+          <a:lstStyle/>
+          <a:p>
+            <a:pPr algn="ctr" indent="0" marL="0">
+              <a:buNone/>
+            </a:pPr>
+            <a:r>
+              <a:rPr lang="en-US" sz="1200" dirty="0">
+                <a:solidFill>
+                  <a:srgbClr val="777777"/>
+                </a:solidFill>
+                <a:latin typeface="Microsoft YaHei" pitchFamily="34" charset="0"/>
+                <a:ea typeface="Microsoft YaHei" pitchFamily="34" charset="-122"/>
+                <a:cs typeface="Microsoft YaHei" pitchFamily="34" charset="-120"/>
+              </a:rPr>
+              <a:t>素材缺失/路径未解析</a:t>
+            </a:r>
+            <a:endParaRPr lang="en-US" sz="1200" dirty="0"/>
+          </a:p>
+        </p:txBody>
+      </p:sp>
+      <p:sp>
+        <p:nvSpPr>
+          <p:cNvPr id="16" name="Text 14"/>
+          <p:cNvSpPr/>
+          <p:nvPr/>
+        </p:nvSpPr>
+        <p:spPr>
+          <a:xfrm>
+            <a:off x="640080" y="3826764"/>
+            <a:ext cx="7863840" cy="292608"/>
+          </a:xfrm>
+          <a:prstGeom prst="rect">
+            <a:avLst/>
+          </a:prstGeom>
+          <a:noFill/>
+          <a:ln/>
+        </p:spPr>
+        <p:txBody>
+          <a:bodyPr wrap="square" rtlCol="0" anchor="t"/>
+          <a:lstStyle/>
+          <a:p>
+            <a:pPr algn="l" indent="0" marL="0">
+              <a:buNone/>
+            </a:pPr>
+            <a:r>
+              <a:rPr lang="en-US" sz="1200" dirty="0">
+                <a:solidFill>
+                  <a:srgbClr val="777777"/>
+                </a:solidFill>
+                <a:latin typeface="Microsoft YaHei" pitchFamily="34" charset="0"/>
+                <a:ea typeface="Microsoft YaHei" pitchFamily="34" charset="-122"/>
+                <a:cs typeface="Microsoft YaHei" pitchFamily="34" charset="-120"/>
+              </a:rPr>
+              <a:t>总结：四阶段闭环后恢复完整急诊效能。</a:t>
+            </a:r>
+            <a:endParaRPr lang="en-US" sz="1200" dirty="0"/>
+          </a:p>
+        </p:txBody>
+      </p:sp>
+      <p:sp>
+        <p:nvSpPr>
+          <p:cNvPr id="17" name="Text 15"/>
+          <p:cNvSpPr/>
+          <p:nvPr/>
+        </p:nvSpPr>
+        <p:spPr>
+          <a:xfrm>
+            <a:off x="640080" y="4530852"/>
+            <a:ext cx="5504688" cy="201168"/>
+          </a:xfrm>
+          <a:prstGeom prst="rect">
+            <a:avLst/>
+          </a:prstGeom>
+          <a:noFill/>
+          <a:ln/>
+        </p:spPr>
+        <p:txBody>
+          <a:bodyPr wrap="square" rtlCol="0" anchor="t"/>
+          <a:lstStyle/>
+          <a:p>
+            <a:pPr algn="l" indent="0" marL="0">
+              <a:buNone/>
+            </a:pPr>
+            <a:r>
+              <a:rPr lang="en-US" sz="800" dirty="0">
+                <a:solidFill>
+                  <a:srgbClr val="777777"/>
+                </a:solidFill>
+                <a:latin typeface="Microsoft YaHei" pitchFamily="34" charset="0"/>
+                <a:ea typeface="Microsoft YaHei" pitchFamily="34" charset="-122"/>
+                <a:cs typeface="Microsoft YaHei" pitchFamily="34" charset="-120"/>
+              </a:rPr>
+              <a:t>实施计划.pdf p.2</a:t>
+            </a:r>
+            <a:endParaRPr lang="en-US" sz="800" dirty="0"/>
+          </a:p>
+        </p:txBody>
+      </p:sp>
+      <p:sp>
+        <p:nvSpPr>
+          <p:cNvPr id="18" name="Text 16"/>
+          <p:cNvSpPr/>
+          <p:nvPr/>
+        </p:nvSpPr>
+        <p:spPr>
+          <a:xfrm>
+            <a:off x="640080" y="2764422"/>
+            <a:ext cx="1880235" cy="1024242"/>
           </a:xfrm>
           <a:prstGeom prst="rect">
             <a:avLst/>
@@ -1084,103 +1454,14 @@
       </p:sp>
       <p:sp>
         <p:nvSpPr>
-          <p:cNvPr id="7" name="Shape 5"/>
-          <p:cNvSpPr/>
-          <p:nvPr/>
-        </p:nvSpPr>
-        <p:spPr>
-          <a:xfrm>
-            <a:off x="2520315" y="2271065"/>
-            <a:ext cx="114300" cy="256032"/>
-          </a:xfrm>
-          <a:prstGeom prst="rect">
-            <a:avLst/>
-          </a:prstGeom>
-          <a:solidFill>
-            <a:srgbClr val="FFFFFF"/>
-          </a:solidFill>
-          <a:ln w="12700">
-            <a:solidFill>
-              <a:srgbClr val="333333"/>
-            </a:solidFill>
-            <a:prstDash val="solid"/>
-          </a:ln>
-        </p:spPr>
-      </p:sp>
-      <p:sp>
-        <p:nvSpPr>
-          <p:cNvPr id="8" name="Shape 6"/>
-          <p:cNvSpPr/>
-          <p:nvPr/>
-        </p:nvSpPr>
-        <p:spPr>
-          <a:xfrm>
-            <a:off x="2634615" y="1453896"/>
-            <a:ext cx="1880235" cy="1263167"/>
-          </a:xfrm>
-          <a:prstGeom prst="rect">
-            <a:avLst/>
-          </a:prstGeom>
-          <a:solidFill>
-            <a:srgbClr val="FFFFFF"/>
-          </a:solidFill>
-          <a:ln w="19050">
-            <a:solidFill>
-              <a:srgbClr val="C47B2B"/>
-            </a:solidFill>
-            <a:prstDash val="dash"/>
-          </a:ln>
-        </p:spPr>
-      </p:sp>
-      <p:sp>
-        <p:nvSpPr>
-          <p:cNvPr id="9" name="Text 7"/>
-          <p:cNvSpPr/>
-          <p:nvPr/>
-        </p:nvSpPr>
-        <p:spPr>
-          <a:xfrm>
-            <a:off x="2771775" y="1902600"/>
-            <a:ext cx="1605915" cy="365760"/>
-          </a:xfrm>
-          <a:prstGeom prst="rect">
-            <a:avLst/>
-          </a:prstGeom>
-          <a:noFill/>
-          <a:ln/>
-        </p:spPr>
-        <p:txBody>
-          <a:bodyPr wrap="square" rtlCol="0" anchor="ctr"/>
-          <a:lstStyle/>
-          <a:p>
-            <a:pPr algn="ctr" indent="0" marL="0">
-              <a:buNone/>
-            </a:pPr>
-            <a:r>
-              <a:rPr lang="en-US" sz="1200" dirty="0">
-                <a:solidFill>
-                  <a:srgbClr val="777777"/>
-                </a:solidFill>
-                <a:latin typeface="Microsoft YaHei" pitchFamily="34" charset="0"/>
-                <a:ea typeface="Microsoft YaHei" pitchFamily="34" charset="-122"/>
-                <a:cs typeface="Microsoft YaHei" pitchFamily="34" charset="-120"/>
-              </a:rPr>
-              <a:t>素材缺失/路径未解析</a:t>
-            </a:r>
-            <a:endParaRPr lang="en-US" sz="1200" dirty="0"/>
-          </a:p>
-        </p:txBody>
-      </p:sp>
-      <p:sp>
-        <p:nvSpPr>
-          <p:cNvPr id="10" name="Text 8"/>
-          <p:cNvSpPr/>
-          <p:nvPr/>
-        </p:nvSpPr>
-        <p:spPr>
-          <a:xfrm>
-            <a:off x="2634615" y="2755163"/>
-            <a:ext cx="1880235" cy="1033501"/>
+          <p:cNvPr id="19" name="Text 17"/>
+          <p:cNvSpPr/>
+          <p:nvPr/>
+        </p:nvSpPr>
+        <p:spPr>
+          <a:xfrm>
+            <a:off x="2634615" y="2764422"/>
+            <a:ext cx="1880235" cy="1024242"/>
           </a:xfrm>
           <a:prstGeom prst="rect">
             <a:avLst/>
@@ -1212,103 +1493,14 @@
       </p:sp>
       <p:sp>
         <p:nvSpPr>
-          <p:cNvPr id="11" name="Shape 9"/>
-          <p:cNvSpPr/>
-          <p:nvPr/>
-        </p:nvSpPr>
-        <p:spPr>
-          <a:xfrm>
-            <a:off x="4514850" y="2271065"/>
-            <a:ext cx="114300" cy="256032"/>
-          </a:xfrm>
-          <a:prstGeom prst="rect">
-            <a:avLst/>
-          </a:prstGeom>
-          <a:solidFill>
-            <a:srgbClr val="FFFFFF"/>
-          </a:solidFill>
-          <a:ln w="12700">
-            <a:solidFill>
-              <a:srgbClr val="333333"/>
-            </a:solidFill>
-            <a:prstDash val="solid"/>
-          </a:ln>
-        </p:spPr>
-      </p:sp>
-      <p:sp>
-        <p:nvSpPr>
-          <p:cNvPr id="12" name="Shape 10"/>
-          <p:cNvSpPr/>
-          <p:nvPr/>
-        </p:nvSpPr>
-        <p:spPr>
-          <a:xfrm>
-            <a:off x="4629150" y="1453896"/>
-            <a:ext cx="1880235" cy="1263167"/>
-          </a:xfrm>
-          <a:prstGeom prst="rect">
-            <a:avLst/>
-          </a:prstGeom>
-          <a:solidFill>
-            <a:srgbClr val="FFFFFF"/>
-          </a:solidFill>
-          <a:ln w="19050">
-            <a:solidFill>
-              <a:srgbClr val="C47B2B"/>
-            </a:solidFill>
-            <a:prstDash val="dash"/>
-          </a:ln>
-        </p:spPr>
-      </p:sp>
-      <p:sp>
-        <p:nvSpPr>
-          <p:cNvPr id="13" name="Text 11"/>
-          <p:cNvSpPr/>
-          <p:nvPr/>
-        </p:nvSpPr>
-        <p:spPr>
-          <a:xfrm>
-            <a:off x="4766310" y="1902600"/>
-            <a:ext cx="1605915" cy="365760"/>
-          </a:xfrm>
-          <a:prstGeom prst="rect">
-            <a:avLst/>
-          </a:prstGeom>
-          <a:noFill/>
-          <a:ln/>
-        </p:spPr>
-        <p:txBody>
-          <a:bodyPr wrap="square" rtlCol="0" anchor="ctr"/>
-          <a:lstStyle/>
-          <a:p>
-            <a:pPr algn="ctr" indent="0" marL="0">
-              <a:buNone/>
-            </a:pPr>
-            <a:r>
-              <a:rPr lang="en-US" sz="1200" dirty="0">
-                <a:solidFill>
-                  <a:srgbClr val="777777"/>
-                </a:solidFill>
-                <a:latin typeface="Microsoft YaHei" pitchFamily="34" charset="0"/>
-                <a:ea typeface="Microsoft YaHei" pitchFamily="34" charset="-122"/>
-                <a:cs typeface="Microsoft YaHei" pitchFamily="34" charset="-120"/>
-              </a:rPr>
-              <a:t>素材缺失/路径未解析</a:t>
-            </a:r>
-            <a:endParaRPr lang="en-US" sz="1200" dirty="0"/>
-          </a:p>
-        </p:txBody>
-      </p:sp>
-      <p:sp>
-        <p:nvSpPr>
-          <p:cNvPr id="14" name="Text 12"/>
-          <p:cNvSpPr/>
-          <p:nvPr/>
-        </p:nvSpPr>
-        <p:spPr>
-          <a:xfrm>
-            <a:off x="4629150" y="2755163"/>
-            <a:ext cx="1880235" cy="1033501"/>
+          <p:cNvPr id="20" name="Text 18"/>
+          <p:cNvSpPr/>
+          <p:nvPr/>
+        </p:nvSpPr>
+        <p:spPr>
+          <a:xfrm>
+            <a:off x="4629150" y="2764422"/>
+            <a:ext cx="1880235" cy="1024242"/>
           </a:xfrm>
           <a:prstGeom prst="rect">
             <a:avLst/>
@@ -1340,103 +1532,14 @@
       </p:sp>
       <p:sp>
         <p:nvSpPr>
-          <p:cNvPr id="15" name="Shape 13"/>
-          <p:cNvSpPr/>
-          <p:nvPr/>
-        </p:nvSpPr>
-        <p:spPr>
-          <a:xfrm>
-            <a:off x="6509385" y="2271065"/>
-            <a:ext cx="114300" cy="256032"/>
-          </a:xfrm>
-          <a:prstGeom prst="rect">
-            <a:avLst/>
-          </a:prstGeom>
-          <a:solidFill>
-            <a:srgbClr val="FFFFFF"/>
-          </a:solidFill>
-          <a:ln w="12700">
-            <a:solidFill>
-              <a:srgbClr val="333333"/>
-            </a:solidFill>
-            <a:prstDash val="solid"/>
-          </a:ln>
-        </p:spPr>
-      </p:sp>
-      <p:sp>
-        <p:nvSpPr>
-          <p:cNvPr id="16" name="Shape 14"/>
-          <p:cNvSpPr/>
-          <p:nvPr/>
-        </p:nvSpPr>
-        <p:spPr>
-          <a:xfrm>
-            <a:off x="6623685" y="1453896"/>
-            <a:ext cx="1880235" cy="1263167"/>
-          </a:xfrm>
-          <a:prstGeom prst="rect">
-            <a:avLst/>
-          </a:prstGeom>
-          <a:solidFill>
-            <a:srgbClr val="FFFFFF"/>
-          </a:solidFill>
-          <a:ln w="19050">
-            <a:solidFill>
-              <a:srgbClr val="C47B2B"/>
-            </a:solidFill>
-            <a:prstDash val="dash"/>
-          </a:ln>
-        </p:spPr>
-      </p:sp>
-      <p:sp>
-        <p:nvSpPr>
-          <p:cNvPr id="17" name="Text 15"/>
-          <p:cNvSpPr/>
-          <p:nvPr/>
-        </p:nvSpPr>
-        <p:spPr>
-          <a:xfrm>
-            <a:off x="6760845" y="1902600"/>
-            <a:ext cx="1605915" cy="365760"/>
-          </a:xfrm>
-          <a:prstGeom prst="rect">
-            <a:avLst/>
-          </a:prstGeom>
-          <a:noFill/>
-          <a:ln/>
-        </p:spPr>
-        <p:txBody>
-          <a:bodyPr wrap="square" rtlCol="0" anchor="ctr"/>
-          <a:lstStyle/>
-          <a:p>
-            <a:pPr algn="ctr" indent="0" marL="0">
-              <a:buNone/>
-            </a:pPr>
-            <a:r>
-              <a:rPr lang="en-US" sz="1200" dirty="0">
-                <a:solidFill>
-                  <a:srgbClr val="777777"/>
-                </a:solidFill>
-                <a:latin typeface="Microsoft YaHei" pitchFamily="34" charset="0"/>
-                <a:ea typeface="Microsoft YaHei" pitchFamily="34" charset="-122"/>
-                <a:cs typeface="Microsoft YaHei" pitchFamily="34" charset="-120"/>
-              </a:rPr>
-              <a:t>素材缺失/路径未解析</a:t>
-            </a:r>
-            <a:endParaRPr lang="en-US" sz="1200" dirty="0"/>
-          </a:p>
-        </p:txBody>
-      </p:sp>
-      <p:sp>
-        <p:nvSpPr>
-          <p:cNvPr id="18" name="Text 16"/>
-          <p:cNvSpPr/>
-          <p:nvPr/>
-        </p:nvSpPr>
-        <p:spPr>
-          <a:xfrm>
-            <a:off x="6623685" y="2755163"/>
-            <a:ext cx="1880235" cy="1033501"/>
+          <p:cNvPr id="21" name="Text 19"/>
+          <p:cNvSpPr/>
+          <p:nvPr/>
+        </p:nvSpPr>
+        <p:spPr>
+          <a:xfrm>
+            <a:off x="6623685" y="2764422"/>
+            <a:ext cx="1880235" cy="1024242"/>
           </a:xfrm>
           <a:prstGeom prst="rect">
             <a:avLst/>
@@ -1463,84 +1566,6 @@
               <a:t>4. 运营回迁</a:t>
             </a:r>
             <a:endParaRPr lang="en-US" sz="1600" dirty="0"/>
-          </a:p>
-        </p:txBody>
-      </p:sp>
-      <p:sp>
-        <p:nvSpPr>
-          <p:cNvPr id="19" name="Text 17"/>
-          <p:cNvSpPr/>
-          <p:nvPr/>
-        </p:nvSpPr>
-        <p:spPr>
-          <a:xfrm>
-            <a:off x="640080" y="3826764"/>
-            <a:ext cx="7863840" cy="292608"/>
-          </a:xfrm>
-          <a:prstGeom prst="rect">
-            <a:avLst/>
-          </a:prstGeom>
-          <a:noFill/>
-          <a:ln/>
-        </p:spPr>
-        <p:txBody>
-          <a:bodyPr wrap="square" rtlCol="0" anchor="t"/>
-          <a:lstStyle/>
-          <a:p>
-            <a:pPr algn="l" indent="0" marL="0">
-              <a:buNone/>
-            </a:pPr>
-            <a:r>
-              <a:rPr lang="en-US" sz="1200" dirty="0">
-                <a:solidFill>
-                  <a:srgbClr val="777777"/>
-                </a:solidFill>
-                <a:latin typeface="Microsoft YaHei" pitchFamily="34" charset="0"/>
-                <a:ea typeface="Microsoft YaHei" pitchFamily="34" charset="-122"/>
-                <a:cs typeface="Microsoft YaHei" pitchFamily="34" charset="-120"/>
-              </a:rPr>
-              <a:t>总结：四阶段闭环后恢复完整急诊效能。</a:t>
-            </a:r>
-            <a:endParaRPr lang="en-US" sz="1200" dirty="0"/>
-          </a:p>
-        </p:txBody>
-      </p:sp>
-      <p:sp>
-        <p:nvSpPr>
-          <p:cNvPr id="20" name="Text 18"/>
-          <p:cNvSpPr/>
-          <p:nvPr/>
-        </p:nvSpPr>
-        <p:spPr>
-          <a:xfrm>
-            <a:off x="640080" y="4530852"/>
-            <a:ext cx="5504688" cy="201168"/>
-          </a:xfrm>
-          <a:prstGeom prst="rect">
-            <a:avLst/>
-          </a:prstGeom>
-          <a:noFill/>
-          <a:ln/>
-        </p:spPr>
-        <p:txBody>
-          <a:bodyPr wrap="square" rtlCol="0" anchor="t"/>
-          <a:lstStyle/>
-          <a:p>
-            <a:pPr algn="l" indent="0" marL="0">
-              <a:buNone/>
-            </a:pPr>
-            <a:r>
-              <a:rPr lang="en-US" sz="800" dirty="0">
-                <a:solidFill>
-                  <a:srgbClr val="777777"/>
-                </a:solidFill>
-                <a:latin typeface="Microsoft YaHei" pitchFamily="34" charset="0"/>
-                <a:ea typeface="Microsoft YaHei" pitchFamily="34" charset="-122"/>
-                <a:cs typeface="Microsoft YaHei" pitchFamily="34" charset="-120"/>
-              </a:rPr>
-              <a:t>实施计划.pdf p.2</a:t>
-            </a:r>
-            <a:endParaRPr lang="en-US" sz="800" dirty="0"/>
           </a:p>
         </p:txBody>
       </p:sp>

--- a/tests/golden/visual/composition/v5_process_narrative/deck.pptx
+++ b/tests/golden/visual/composition/v5_process_narrative/deck.pptx
@@ -910,7 +910,7 @@
         <p:spPr>
           <a:xfrm>
             <a:off x="640080" y="411480"/>
-            <a:ext cx="7863840" cy="621792"/>
+            <a:ext cx="7863840" cy="601218"/>
           </a:xfrm>
           <a:prstGeom prst="rect">
             <a:avLst/>
@@ -948,7 +948,7 @@
         </p:nvSpPr>
         <p:spPr>
           <a:xfrm>
-            <a:off x="640080" y="1071372"/>
+            <a:off x="640080" y="1050798"/>
             <a:ext cx="7863840" cy="326898"/>
           </a:xfrm>
           <a:prstGeom prst="rect">
@@ -987,7 +987,7 @@
         </p:nvSpPr>
         <p:spPr>
           <a:xfrm>
-            <a:off x="1580198" y="1752173"/>
+            <a:off x="1580198" y="1734068"/>
             <a:ext cx="5983605" cy="32004"/>
           </a:xfrm>
           <a:prstGeom prst="rect">
@@ -1012,8 +1012,8 @@
         </p:nvSpPr>
         <p:spPr>
           <a:xfrm>
-            <a:off x="640080" y="1474470"/>
-            <a:ext cx="1880235" cy="1251852"/>
+            <a:off x="640080" y="1453896"/>
+            <a:ext cx="1880235" cy="1263167"/>
           </a:xfrm>
           <a:prstGeom prst="rect">
             <a:avLst/>
@@ -1037,7 +1037,7 @@
         </p:nvSpPr>
         <p:spPr>
           <a:xfrm>
-            <a:off x="777240" y="1917516"/>
+            <a:off x="777240" y="1902600"/>
             <a:ext cx="1605915" cy="365760"/>
           </a:xfrm>
           <a:prstGeom prst="rect">
@@ -1076,7 +1076,7 @@
         </p:nvSpPr>
         <p:spPr>
           <a:xfrm>
-            <a:off x="2520315" y="2284438"/>
+            <a:off x="2520315" y="2271065"/>
             <a:ext cx="114300" cy="256032"/>
           </a:xfrm>
           <a:prstGeom prst="rect">
@@ -1101,8 +1101,8 @@
         </p:nvSpPr>
         <p:spPr>
           <a:xfrm>
-            <a:off x="2634615" y="1474470"/>
-            <a:ext cx="1880235" cy="1251852"/>
+            <a:off x="2634615" y="1453896"/>
+            <a:ext cx="1880235" cy="1263167"/>
           </a:xfrm>
           <a:prstGeom prst="rect">
             <a:avLst/>
@@ -1126,7 +1126,7 @@
         </p:nvSpPr>
         <p:spPr>
           <a:xfrm>
-            <a:off x="2771775" y="1917516"/>
+            <a:off x="2771775" y="1902600"/>
             <a:ext cx="1605915" cy="365760"/>
           </a:xfrm>
           <a:prstGeom prst="rect">
@@ -1165,7 +1165,7 @@
         </p:nvSpPr>
         <p:spPr>
           <a:xfrm>
-            <a:off x="4514850" y="2284438"/>
+            <a:off x="4514850" y="2271065"/>
             <a:ext cx="114300" cy="256032"/>
           </a:xfrm>
           <a:prstGeom prst="rect">
@@ -1190,8 +1190,8 @@
         </p:nvSpPr>
         <p:spPr>
           <a:xfrm>
-            <a:off x="4629150" y="1474470"/>
-            <a:ext cx="1880235" cy="1251852"/>
+            <a:off x="4629150" y="1453896"/>
+            <a:ext cx="1880235" cy="1263167"/>
           </a:xfrm>
           <a:prstGeom prst="rect">
             <a:avLst/>
@@ -1215,7 +1215,7 @@
         </p:nvSpPr>
         <p:spPr>
           <a:xfrm>
-            <a:off x="4766310" y="1917516"/>
+            <a:off x="4766310" y="1902600"/>
             <a:ext cx="1605915" cy="365760"/>
           </a:xfrm>
           <a:prstGeom prst="rect">
@@ -1254,7 +1254,7 @@
         </p:nvSpPr>
         <p:spPr>
           <a:xfrm>
-            <a:off x="6509385" y="2284438"/>
+            <a:off x="6509385" y="2271065"/>
             <a:ext cx="114300" cy="256032"/>
           </a:xfrm>
           <a:prstGeom prst="rect">
@@ -1279,8 +1279,8 @@
         </p:nvSpPr>
         <p:spPr>
           <a:xfrm>
-            <a:off x="6623685" y="1474470"/>
-            <a:ext cx="1880235" cy="1251852"/>
+            <a:off x="6623685" y="1453896"/>
+            <a:ext cx="1880235" cy="1263167"/>
           </a:xfrm>
           <a:prstGeom prst="rect">
             <a:avLst/>
@@ -1304,7 +1304,7 @@
         </p:nvSpPr>
         <p:spPr>
           <a:xfrm>
-            <a:off x="6760845" y="1917516"/>
+            <a:off x="6760845" y="1902600"/>
             <a:ext cx="1605915" cy="365760"/>
           </a:xfrm>
           <a:prstGeom prst="rect">
@@ -1421,8 +1421,8 @@
         </p:nvSpPr>
         <p:spPr>
           <a:xfrm>
-            <a:off x="640080" y="2764422"/>
-            <a:ext cx="1880235" cy="1024242"/>
+            <a:off x="640080" y="2755163"/>
+            <a:ext cx="1880235" cy="1033501"/>
           </a:xfrm>
           <a:prstGeom prst="rect">
             <a:avLst/>
@@ -1460,8 +1460,8 @@
         </p:nvSpPr>
         <p:spPr>
           <a:xfrm>
-            <a:off x="2634615" y="2764422"/>
-            <a:ext cx="1880235" cy="1024242"/>
+            <a:off x="2634615" y="2755163"/>
+            <a:ext cx="1880235" cy="1033501"/>
           </a:xfrm>
           <a:prstGeom prst="rect">
             <a:avLst/>
@@ -1499,8 +1499,8 @@
         </p:nvSpPr>
         <p:spPr>
           <a:xfrm>
-            <a:off x="4629150" y="2764422"/>
-            <a:ext cx="1880235" cy="1024242"/>
+            <a:off x="4629150" y="2755163"/>
+            <a:ext cx="1880235" cy="1033501"/>
           </a:xfrm>
           <a:prstGeom prst="rect">
             <a:avLst/>
@@ -1538,8 +1538,8 @@
         </p:nvSpPr>
         <p:spPr>
           <a:xfrm>
-            <a:off x="6623685" y="2764422"/>
-            <a:ext cx="1880235" cy="1024242"/>
+            <a:off x="6623685" y="2755163"/>
+            <a:ext cx="1880235" cy="1033501"/>
           </a:xfrm>
           <a:prstGeom prst="rect">
             <a:avLst/>

--- a/tests/golden/visual/composition/v5_process_narrative/deck.pptx
+++ b/tests/golden/visual/composition/v5_process_narrative/deck.pptx
@@ -580,7 +580,7 @@
     <p:bg>
       <p:bgPr>
         <a:solidFill>
-          <a:srgbClr val="F7F6F3"/>
+          <a:srgbClr val="D9E2EA"/>
         </a:solidFill>
       </p:bgPr>
     </p:bg>
@@ -909,8 +909,8 @@
         </p:nvSpPr>
         <p:spPr>
           <a:xfrm>
-            <a:off x="640080" y="411480"/>
-            <a:ext cx="7863840" cy="601218"/>
+            <a:off x="502920" y="347472"/>
+            <a:ext cx="8138160" cy="594360"/>
           </a:xfrm>
           <a:prstGeom prst="rect">
             <a:avLst/>
@@ -926,9 +926,9 @@
               <a:buNone/>
             </a:pPr>
             <a:r>
-              <a:rPr lang="en-US" sz="3400" b="1" dirty="0">
+              <a:rPr lang="en-US" sz="2000" b="1" dirty="0">
                 <a:solidFill>
-                  <a:srgbClr val="1A1A1A"/>
+                  <a:srgbClr val="1B3A4B"/>
                 </a:solidFill>
                 <a:latin typeface="Microsoft YaHei" pitchFamily="34" charset="0"/>
                 <a:ea typeface="Microsoft YaHei" pitchFamily="34" charset="-122"/>
@@ -936,7 +936,7 @@
               </a:rPr>
               <a:t>改扩建四阶段实施路径</a:t>
             </a:r>
-            <a:endParaRPr lang="en-US" sz="3400" dirty="0"/>
+            <a:endParaRPr lang="en-US" sz="2000" dirty="0"/>
           </a:p>
         </p:txBody>
       </p:sp>
@@ -948,8 +948,8 @@
         </p:nvSpPr>
         <p:spPr>
           <a:xfrm>
-            <a:off x="640080" y="1050798"/>
-            <a:ext cx="7863840" cy="326898"/>
+            <a:off x="502920" y="979932"/>
+            <a:ext cx="8138160" cy="292608"/>
           </a:xfrm>
           <a:prstGeom prst="rect">
             <a:avLst/>
@@ -965,9 +965,9 @@
               <a:buNone/>
             </a:pPr>
             <a:r>
-              <a:rPr lang="en-US" sz="1800" dirty="0">
+              <a:rPr lang="en-US" sz="1400" b="1" dirty="0">
                 <a:solidFill>
-                  <a:srgbClr val="4A4A4A"/>
+                  <a:srgbClr val="1B3A4B"/>
                 </a:solidFill>
                 <a:latin typeface="Microsoft YaHei" pitchFamily="34" charset="0"/>
                 <a:ea typeface="Microsoft YaHei" pitchFamily="34" charset="-122"/>
@@ -975,7 +975,7 @@
               </a:rPr>
               <a:t>分期实施可在不停诊条件下完成核心区更新。</a:t>
             </a:r>
-            <a:endParaRPr lang="en-US" sz="1800" dirty="0"/>
+            <a:endParaRPr lang="en-US" sz="1400" dirty="0"/>
           </a:p>
         </p:txBody>
       </p:sp>
@@ -987,18 +987,18 @@
         </p:nvSpPr>
         <p:spPr>
           <a:xfrm>
-            <a:off x="1580198" y="1734068"/>
-            <a:ext cx="5983605" cy="32004"/>
-          </a:xfrm>
-          <a:prstGeom prst="rect">
-            <a:avLst/>
-          </a:prstGeom>
-          <a:solidFill>
-            <a:srgbClr val="D9D5CF"/>
+            <a:off x="1477327" y="1649212"/>
+            <a:ext cx="6189345" cy="32004"/>
+          </a:xfrm>
+          <a:prstGeom prst="rect">
+            <a:avLst/>
+          </a:prstGeom>
+          <a:solidFill>
+            <a:srgbClr val="B7C5D1"/>
           </a:solidFill>
           <a:ln w="12700">
             <a:solidFill>
-              <a:srgbClr val="D9D5CF"/>
+              <a:srgbClr val="B7C5D1"/>
             </a:solidFill>
             <a:prstDash val="solid"/>
           </a:ln>
@@ -1012,14 +1012,14 @@
         </p:nvSpPr>
         <p:spPr>
           <a:xfrm>
-            <a:off x="640080" y="1453896"/>
-            <a:ext cx="1880235" cy="1263167"/>
-          </a:xfrm>
-          <a:prstGeom prst="rect">
-            <a:avLst/>
-          </a:prstGeom>
-          <a:solidFill>
-            <a:srgbClr val="FFFFFF"/>
+            <a:off x="502920" y="1348740"/>
+            <a:ext cx="1948815" cy="1356208"/>
+          </a:xfrm>
+          <a:prstGeom prst="rect">
+            <a:avLst/>
+          </a:prstGeom>
+          <a:solidFill>
+            <a:srgbClr val="F3F7FA"/>
           </a:solidFill>
           <a:ln w="19050">
             <a:solidFill>
@@ -1037,8 +1037,8 @@
         </p:nvSpPr>
         <p:spPr>
           <a:xfrm>
-            <a:off x="777240" y="1902600"/>
-            <a:ext cx="1605915" cy="365760"/>
+            <a:off x="640080" y="1843964"/>
+            <a:ext cx="1674495" cy="365760"/>
           </a:xfrm>
           <a:prstGeom prst="rect">
             <a:avLst/>
@@ -1056,7 +1056,7 @@
             <a:r>
               <a:rPr lang="en-US" sz="1200" dirty="0">
                 <a:solidFill>
-                  <a:srgbClr val="777777"/>
+                  <a:srgbClr val="6A7D8C"/>
                 </a:solidFill>
                 <a:latin typeface="Microsoft YaHei" pitchFamily="34" charset="0"/>
                 <a:ea typeface="Microsoft YaHei" pitchFamily="34" charset="-122"/>
@@ -1076,18 +1076,18 @@
         </p:nvSpPr>
         <p:spPr>
           <a:xfrm>
-            <a:off x="2520315" y="2271065"/>
+            <a:off x="2451735" y="2225116"/>
             <a:ext cx="114300" cy="256032"/>
           </a:xfrm>
           <a:prstGeom prst="rect">
             <a:avLst/>
           </a:prstGeom>
           <a:solidFill>
-            <a:srgbClr val="FFFFFF"/>
+            <a:srgbClr val="F3F7FA"/>
           </a:solidFill>
           <a:ln w="12700">
             <a:solidFill>
-              <a:srgbClr val="D9D5CF"/>
+              <a:srgbClr val="B7C5D1"/>
             </a:solidFill>
             <a:prstDash val="solid"/>
           </a:ln>
@@ -1101,14 +1101,14 @@
         </p:nvSpPr>
         <p:spPr>
           <a:xfrm>
-            <a:off x="2634615" y="1453896"/>
-            <a:ext cx="1880235" cy="1263167"/>
-          </a:xfrm>
-          <a:prstGeom prst="rect">
-            <a:avLst/>
-          </a:prstGeom>
-          <a:solidFill>
-            <a:srgbClr val="FFFFFF"/>
+            <a:off x="2566035" y="1348740"/>
+            <a:ext cx="1948815" cy="1356208"/>
+          </a:xfrm>
+          <a:prstGeom prst="rect">
+            <a:avLst/>
+          </a:prstGeom>
+          <a:solidFill>
+            <a:srgbClr val="F3F7FA"/>
           </a:solidFill>
           <a:ln w="19050">
             <a:solidFill>
@@ -1126,8 +1126,8 @@
         </p:nvSpPr>
         <p:spPr>
           <a:xfrm>
-            <a:off x="2771775" y="1902600"/>
-            <a:ext cx="1605915" cy="365760"/>
+            <a:off x="2703195" y="1843964"/>
+            <a:ext cx="1674495" cy="365760"/>
           </a:xfrm>
           <a:prstGeom prst="rect">
             <a:avLst/>
@@ -1145,7 +1145,7 @@
             <a:r>
               <a:rPr lang="en-US" sz="1200" dirty="0">
                 <a:solidFill>
-                  <a:srgbClr val="777777"/>
+                  <a:srgbClr val="6A7D8C"/>
                 </a:solidFill>
                 <a:latin typeface="Microsoft YaHei" pitchFamily="34" charset="0"/>
                 <a:ea typeface="Microsoft YaHei" pitchFamily="34" charset="-122"/>
@@ -1165,18 +1165,18 @@
         </p:nvSpPr>
         <p:spPr>
           <a:xfrm>
-            <a:off x="4514850" y="2271065"/>
+            <a:off x="4514850" y="2225116"/>
             <a:ext cx="114300" cy="256032"/>
           </a:xfrm>
           <a:prstGeom prst="rect">
             <a:avLst/>
           </a:prstGeom>
           <a:solidFill>
-            <a:srgbClr val="FFFFFF"/>
+            <a:srgbClr val="F3F7FA"/>
           </a:solidFill>
           <a:ln w="12700">
             <a:solidFill>
-              <a:srgbClr val="D9D5CF"/>
+              <a:srgbClr val="B7C5D1"/>
             </a:solidFill>
             <a:prstDash val="solid"/>
           </a:ln>
@@ -1190,14 +1190,14 @@
         </p:nvSpPr>
         <p:spPr>
           <a:xfrm>
-            <a:off x="4629150" y="1453896"/>
-            <a:ext cx="1880235" cy="1263167"/>
-          </a:xfrm>
-          <a:prstGeom prst="rect">
-            <a:avLst/>
-          </a:prstGeom>
-          <a:solidFill>
-            <a:srgbClr val="FFFFFF"/>
+            <a:off x="4629150" y="1348740"/>
+            <a:ext cx="1948815" cy="1356208"/>
+          </a:xfrm>
+          <a:prstGeom prst="rect">
+            <a:avLst/>
+          </a:prstGeom>
+          <a:solidFill>
+            <a:srgbClr val="F3F7FA"/>
           </a:solidFill>
           <a:ln w="19050">
             <a:solidFill>
@@ -1215,8 +1215,8 @@
         </p:nvSpPr>
         <p:spPr>
           <a:xfrm>
-            <a:off x="4766310" y="1902600"/>
-            <a:ext cx="1605915" cy="365760"/>
+            <a:off x="4766310" y="1843964"/>
+            <a:ext cx="1674495" cy="365760"/>
           </a:xfrm>
           <a:prstGeom prst="rect">
             <a:avLst/>
@@ -1234,7 +1234,7 @@
             <a:r>
               <a:rPr lang="en-US" sz="1200" dirty="0">
                 <a:solidFill>
-                  <a:srgbClr val="777777"/>
+                  <a:srgbClr val="6A7D8C"/>
                 </a:solidFill>
                 <a:latin typeface="Microsoft YaHei" pitchFamily="34" charset="0"/>
                 <a:ea typeface="Microsoft YaHei" pitchFamily="34" charset="-122"/>
@@ -1254,18 +1254,18 @@
         </p:nvSpPr>
         <p:spPr>
           <a:xfrm>
-            <a:off x="6509385" y="2271065"/>
+            <a:off x="6577965" y="2225116"/>
             <a:ext cx="114300" cy="256032"/>
           </a:xfrm>
           <a:prstGeom prst="rect">
             <a:avLst/>
           </a:prstGeom>
           <a:solidFill>
-            <a:srgbClr val="FFFFFF"/>
+            <a:srgbClr val="F3F7FA"/>
           </a:solidFill>
           <a:ln w="12700">
             <a:solidFill>
-              <a:srgbClr val="D9D5CF"/>
+              <a:srgbClr val="B7C5D1"/>
             </a:solidFill>
             <a:prstDash val="solid"/>
           </a:ln>
@@ -1279,14 +1279,14 @@
         </p:nvSpPr>
         <p:spPr>
           <a:xfrm>
-            <a:off x="6623685" y="1453896"/>
-            <a:ext cx="1880235" cy="1263167"/>
-          </a:xfrm>
-          <a:prstGeom prst="rect">
-            <a:avLst/>
-          </a:prstGeom>
-          <a:solidFill>
-            <a:srgbClr val="FFFFFF"/>
+            <a:off x="6692265" y="1348740"/>
+            <a:ext cx="1948815" cy="1356208"/>
+          </a:xfrm>
+          <a:prstGeom prst="rect">
+            <a:avLst/>
+          </a:prstGeom>
+          <a:solidFill>
+            <a:srgbClr val="F3F7FA"/>
           </a:solidFill>
           <a:ln w="19050">
             <a:solidFill>
@@ -1304,8 +1304,8 @@
         </p:nvSpPr>
         <p:spPr>
           <a:xfrm>
-            <a:off x="6760845" y="1902600"/>
-            <a:ext cx="1605915" cy="365760"/>
+            <a:off x="6829425" y="1843964"/>
+            <a:ext cx="1674495" cy="365760"/>
           </a:xfrm>
           <a:prstGeom prst="rect">
             <a:avLst/>
@@ -1323,7 +1323,7 @@
             <a:r>
               <a:rPr lang="en-US" sz="1200" dirty="0">
                 <a:solidFill>
-                  <a:srgbClr val="777777"/>
+                  <a:srgbClr val="6A7D8C"/>
                 </a:solidFill>
                 <a:latin typeface="Microsoft YaHei" pitchFamily="34" charset="0"/>
                 <a:ea typeface="Microsoft YaHei" pitchFamily="34" charset="-122"/>
@@ -1343,8 +1343,8 @@
         </p:nvSpPr>
         <p:spPr>
           <a:xfrm>
-            <a:off x="640080" y="3826764"/>
-            <a:ext cx="7863840" cy="292608"/>
+            <a:off x="502920" y="3890772"/>
+            <a:ext cx="8138160" cy="292608"/>
           </a:xfrm>
           <a:prstGeom prst="rect">
             <a:avLst/>
@@ -1360,9 +1360,9 @@
               <a:buNone/>
             </a:pPr>
             <a:r>
-              <a:rPr lang="en-US" sz="1200" dirty="0">
+              <a:rPr lang="en-US" sz="1100" dirty="0">
                 <a:solidFill>
-                  <a:srgbClr val="777777"/>
+                  <a:srgbClr val="3A4F5F"/>
                 </a:solidFill>
                 <a:latin typeface="Microsoft YaHei" pitchFamily="34" charset="0"/>
                 <a:ea typeface="Microsoft YaHei" pitchFamily="34" charset="-122"/>
@@ -1370,7 +1370,7 @@
               </a:rPr>
               <a:t>总结：四阶段闭环后恢复完整急诊效能。</a:t>
             </a:r>
-            <a:endParaRPr lang="en-US" sz="1200" dirty="0"/>
+            <a:endParaRPr lang="en-US" sz="1100" dirty="0"/>
           </a:p>
         </p:txBody>
       </p:sp>
@@ -1382,8 +1382,8 @@
         </p:nvSpPr>
         <p:spPr>
           <a:xfrm>
-            <a:off x="640080" y="4530852"/>
-            <a:ext cx="5504688" cy="201168"/>
+            <a:off x="502920" y="4594860"/>
+            <a:ext cx="5696712" cy="201168"/>
           </a:xfrm>
           <a:prstGeom prst="rect">
             <a:avLst/>
@@ -1401,7 +1401,7 @@
             <a:r>
               <a:rPr lang="en-US" sz="800" dirty="0">
                 <a:solidFill>
-                  <a:srgbClr val="777777"/>
+                  <a:srgbClr val="6A7D8C"/>
                 </a:solidFill>
                 <a:latin typeface="Microsoft YaHei" pitchFamily="34" charset="0"/>
                 <a:ea typeface="Microsoft YaHei" pitchFamily="34" charset="-122"/>
@@ -1421,8 +1421,8 @@
         </p:nvSpPr>
         <p:spPr>
           <a:xfrm>
-            <a:off x="640080" y="2755163"/>
-            <a:ext cx="1880235" cy="1033501"/>
+            <a:off x="502920" y="2743048"/>
+            <a:ext cx="1948815" cy="1109624"/>
           </a:xfrm>
           <a:prstGeom prst="rect">
             <a:avLst/>
@@ -1438,9 +1438,9 @@
               <a:buNone/>
             </a:pPr>
             <a:r>
-              <a:rPr lang="en-US" sz="1600" dirty="0">
+              <a:rPr lang="en-US" sz="1400" dirty="0">
                 <a:solidFill>
-                  <a:srgbClr val="1A1A1A"/>
+                  <a:srgbClr val="132533"/>
                 </a:solidFill>
                 <a:latin typeface="Microsoft YaHei" pitchFamily="34" charset="0"/>
                 <a:ea typeface="Microsoft YaHei" pitchFamily="34" charset="-122"/>
@@ -1448,7 +1448,7 @@
               </a:rPr>
               <a:t>1. 现状梳理</a:t>
             </a:r>
-            <a:endParaRPr lang="en-US" sz="1600" dirty="0"/>
+            <a:endParaRPr lang="en-US" sz="1400" dirty="0"/>
           </a:p>
         </p:txBody>
       </p:sp>
@@ -1460,8 +1460,8 @@
         </p:nvSpPr>
         <p:spPr>
           <a:xfrm>
-            <a:off x="2634615" y="2755163"/>
-            <a:ext cx="1880235" cy="1033501"/>
+            <a:off x="2566035" y="2743048"/>
+            <a:ext cx="1948815" cy="1109624"/>
           </a:xfrm>
           <a:prstGeom prst="rect">
             <a:avLst/>
@@ -1477,9 +1477,9 @@
               <a:buNone/>
             </a:pPr>
             <a:r>
-              <a:rPr lang="en-US" sz="1600" dirty="0">
+              <a:rPr lang="en-US" sz="1400" dirty="0">
                 <a:solidFill>
-                  <a:srgbClr val="1A1A1A"/>
+                  <a:srgbClr val="132533"/>
                 </a:solidFill>
                 <a:latin typeface="Microsoft YaHei" pitchFamily="34" charset="0"/>
                 <a:ea typeface="Microsoft YaHei" pitchFamily="34" charset="-122"/>
@@ -1487,7 +1487,7 @@
               </a:rPr>
               <a:t>2. 临时分流</a:t>
             </a:r>
-            <a:endParaRPr lang="en-US" sz="1600" dirty="0"/>
+            <a:endParaRPr lang="en-US" sz="1400" dirty="0"/>
           </a:p>
         </p:txBody>
       </p:sp>
@@ -1499,8 +1499,8 @@
         </p:nvSpPr>
         <p:spPr>
           <a:xfrm>
-            <a:off x="4629150" y="2755163"/>
-            <a:ext cx="1880235" cy="1033501"/>
+            <a:off x="4629150" y="2743048"/>
+            <a:ext cx="1948815" cy="1109624"/>
           </a:xfrm>
           <a:prstGeom prst="rect">
             <a:avLst/>
@@ -1516,9 +1516,9 @@
               <a:buNone/>
             </a:pPr>
             <a:r>
-              <a:rPr lang="en-US" sz="1600" dirty="0">
+              <a:rPr lang="en-US" sz="1400" dirty="0">
                 <a:solidFill>
-                  <a:srgbClr val="1A1A1A"/>
+                  <a:srgbClr val="132533"/>
                 </a:solidFill>
                 <a:latin typeface="Microsoft YaHei" pitchFamily="34" charset="0"/>
                 <a:ea typeface="Microsoft YaHei" pitchFamily="34" charset="-122"/>
@@ -1526,7 +1526,7 @@
               </a:rPr>
               <a:t>3. 主体改造</a:t>
             </a:r>
-            <a:endParaRPr lang="en-US" sz="1600" dirty="0"/>
+            <a:endParaRPr lang="en-US" sz="1400" dirty="0"/>
           </a:p>
         </p:txBody>
       </p:sp>
@@ -1538,8 +1538,8 @@
         </p:nvSpPr>
         <p:spPr>
           <a:xfrm>
-            <a:off x="6623685" y="2755163"/>
-            <a:ext cx="1880235" cy="1033501"/>
+            <a:off x="6692265" y="2743048"/>
+            <a:ext cx="1948815" cy="1109624"/>
           </a:xfrm>
           <a:prstGeom prst="rect">
             <a:avLst/>
@@ -1555,9 +1555,9 @@
               <a:buNone/>
             </a:pPr>
             <a:r>
-              <a:rPr lang="en-US" sz="1600" dirty="0">
+              <a:rPr lang="en-US" sz="1400" dirty="0">
                 <a:solidFill>
-                  <a:srgbClr val="1A1A1A"/>
+                  <a:srgbClr val="132533"/>
                 </a:solidFill>
                 <a:latin typeface="Microsoft YaHei" pitchFamily="34" charset="0"/>
                 <a:ea typeface="Microsoft YaHei" pitchFamily="34" charset="-122"/>
@@ -1565,7 +1565,7 @@
               </a:rPr>
               <a:t>4. 运营回迁</a:t>
             </a:r>
-            <a:endParaRPr lang="en-US" sz="1600" dirty="0"/>
+            <a:endParaRPr lang="en-US" sz="1400" dirty="0"/>
           </a:p>
         </p:txBody>
       </p:sp>
